--- a/ppt/Virtual Server Monitoring and Performance Optimization.pptx
+++ b/ppt/Virtual Server Monitoring and Performance Optimization.pptx
@@ -5,17 +5,18 @@
     <p:sldMasterId id="2147483648" r:id="rId1"/>
   </p:sldMasterIdLst>
   <p:notesMasterIdLst>
-    <p:notesMasterId r:id="rId10"/>
+    <p:notesMasterId r:id="rId11"/>
   </p:notesMasterIdLst>
   <p:sldIdLst>
     <p:sldId id="256" r:id="rId2"/>
     <p:sldId id="257" r:id="rId3"/>
     <p:sldId id="258" r:id="rId4"/>
     <p:sldId id="259" r:id="rId5"/>
-    <p:sldId id="260" r:id="rId6"/>
-    <p:sldId id="261" r:id="rId7"/>
-    <p:sldId id="262" r:id="rId8"/>
-    <p:sldId id="263" r:id="rId9"/>
+    <p:sldId id="264" r:id="rId6"/>
+    <p:sldId id="260" r:id="rId7"/>
+    <p:sldId id="261" r:id="rId8"/>
+    <p:sldId id="262" r:id="rId9"/>
+    <p:sldId id="263" r:id="rId10"/>
   </p:sldIdLst>
   <p:sldSz cx="12192000" cy="6858000"/>
   <p:notesSz cx="6858000" cy="9144000"/>
@@ -9974,6 +9975,14 @@
 <file path=ppt/slides/slide1.xml><?xml version="1.0" encoding="utf-8"?>
 <p:sld xmlns:a="http://schemas.openxmlformats.org/drawingml/2006/main" xmlns:r="http://schemas.openxmlformats.org/officeDocument/2006/relationships" xmlns:p="http://schemas.openxmlformats.org/presentationml/2006/main">
   <p:cSld>
+    <p:bg>
+      <p:bgPr>
+        <a:solidFill>
+          <a:schemeClr val="bg1"/>
+        </a:solidFill>
+        <a:effectLst/>
+      </p:bgPr>
+    </p:bg>
     <p:spTree>
       <p:nvGrpSpPr>
         <p:cNvPr id="1" name=""/>
@@ -9988,6 +9997,526 @@
           <a:chExt cx="0" cy="0"/>
         </a:xfrm>
       </p:grpSpPr>
+      <p:sp useBgFill="1">
+        <p:nvSpPr>
+          <p:cNvPr id="29" name="Rectangle 28">
+            <a:extLst>
+              <a:ext uri="{FF2B5EF4-FFF2-40B4-BE49-F238E27FC236}">
+                <a16:creationId xmlns:a16="http://schemas.microsoft.com/office/drawing/2014/main" id="{6F5A5072-7B47-4D32-B52A-4EBBF590B8A5}"/>
+              </a:ext>
+              <a:ext uri="{C183D7F6-B498-43B3-948B-1728B52AA6E4}">
+                <adec:decorative xmlns:adec="http://schemas.microsoft.com/office/drawing/2017/decorative" val="1"/>
+              </a:ext>
+            </a:extLst>
+          </p:cNvPr>
+          <p:cNvSpPr>
+            <a:spLocks noGrp="1" noRot="1" noChangeAspect="1" noMove="1" noResize="1" noEditPoints="1" noAdjustHandles="1" noChangeArrowheads="1" noChangeShapeType="1" noTextEdit="1"/>
+          </p:cNvSpPr>
+          <p:nvPr>
+            <p:extLst>
+              <p:ext uri="{386F3935-93C4-4BCD-93E2-E3B085C9AB24}">
+                <p16:designElem xmlns:p16="http://schemas.microsoft.com/office/powerpoint/2015/main" val="1"/>
+              </p:ext>
+            </p:extLst>
+          </p:nvPr>
+        </p:nvSpPr>
+        <p:spPr>
+          <a:xfrm>
+            <a:off x="0" y="0"/>
+            <a:ext cx="12192000" cy="6858000"/>
+          </a:xfrm>
+          <a:prstGeom prst="rect">
+            <a:avLst/>
+          </a:prstGeom>
+          <a:ln w="12700" cap="flat" cmpd="sng" algn="ctr">
+            <a:noFill/>
+            <a:prstDash val="solid"/>
+            <a:miter lim="800000"/>
+          </a:ln>
+          <a:effectLst/>
+          <a:extLst>
+            <a:ext uri="{91240B29-F687-4F45-9708-019B960494DF}">
+              <a14:hiddenLine xmlns:a14="http://schemas.microsoft.com/office/drawing/2010/main" w="12700" cap="flat" cmpd="sng" algn="ctr">
+                <a:solidFill>
+                  <a:schemeClr val="accent1">
+                    <a:shade val="50000"/>
+                  </a:schemeClr>
+                </a:solidFill>
+                <a:prstDash val="solid"/>
+                <a:miter lim="800000"/>
+              </a14:hiddenLine>
+            </a:ext>
+          </a:extLst>
+        </p:spPr>
+        <p:style>
+          <a:lnRef idx="2">
+            <a:schemeClr val="accent1">
+              <a:shade val="50000"/>
+            </a:schemeClr>
+          </a:lnRef>
+          <a:fillRef idx="1">
+            <a:schemeClr val="accent1"/>
+          </a:fillRef>
+          <a:effectRef idx="0">
+            <a:schemeClr val="accent1"/>
+          </a:effectRef>
+          <a:fontRef idx="minor">
+            <a:schemeClr val="lt1"/>
+          </a:fontRef>
+        </p:style>
+        <p:txBody>
+          <a:bodyPr rtlCol="0" anchor="ctr"/>
+          <a:lstStyle/>
+          <a:p>
+            <a:pPr algn="ctr"/>
+            <a:endParaRPr lang="en-US"/>
+          </a:p>
+        </p:txBody>
+      </p:sp>
+      <p:sp>
+        <p:nvSpPr>
+          <p:cNvPr id="31" name="Rectangle 30">
+            <a:extLst>
+              <a:ext uri="{FF2B5EF4-FFF2-40B4-BE49-F238E27FC236}">
+                <a16:creationId xmlns:a16="http://schemas.microsoft.com/office/drawing/2014/main" id="{9715DAF0-AE1B-46C9-8A6B-DB2AA05AB91D}"/>
+              </a:ext>
+              <a:ext uri="{C183D7F6-B498-43B3-948B-1728B52AA6E4}">
+                <adec:decorative xmlns:adec="http://schemas.microsoft.com/office/drawing/2017/decorative" val="1"/>
+              </a:ext>
+            </a:extLst>
+          </p:cNvPr>
+          <p:cNvSpPr>
+            <a:spLocks noGrp="1" noRot="1" noChangeAspect="1" noMove="1" noResize="1" noEditPoints="1" noAdjustHandles="1" noChangeArrowheads="1" noChangeShapeType="1" noTextEdit="1"/>
+          </p:cNvSpPr>
+          <p:nvPr>
+            <p:extLst>
+              <p:ext uri="{386F3935-93C4-4BCD-93E2-E3B085C9AB24}">
+                <p16:designElem xmlns:p16="http://schemas.microsoft.com/office/powerpoint/2015/main" val="1"/>
+              </p:ext>
+            </p:extLst>
+          </p:nvPr>
+        </p:nvSpPr>
+        <p:spPr>
+          <a:xfrm rot="10800000">
+            <a:off x="-2" y="-22693"/>
+            <a:ext cx="12191999" cy="4374129"/>
+          </a:xfrm>
+          <a:prstGeom prst="rect">
+            <a:avLst/>
+          </a:prstGeom>
+          <a:gradFill>
+            <a:gsLst>
+              <a:gs pos="0">
+                <a:schemeClr val="accent1">
+                  <a:lumMod val="75000"/>
+                </a:schemeClr>
+              </a:gs>
+              <a:gs pos="100000">
+                <a:srgbClr val="000000"/>
+              </a:gs>
+            </a:gsLst>
+            <a:lin ang="15000000" scaled="0"/>
+          </a:gradFill>
+          <a:ln>
+            <a:noFill/>
+          </a:ln>
+        </p:spPr>
+        <p:style>
+          <a:lnRef idx="2">
+            <a:schemeClr val="accent1">
+              <a:shade val="50000"/>
+            </a:schemeClr>
+          </a:lnRef>
+          <a:fillRef idx="1">
+            <a:schemeClr val="accent1"/>
+          </a:fillRef>
+          <a:effectRef idx="0">
+            <a:schemeClr val="accent1"/>
+          </a:effectRef>
+          <a:fontRef idx="minor">
+            <a:schemeClr val="lt1"/>
+          </a:fontRef>
+        </p:style>
+        <p:txBody>
+          <a:bodyPr rtlCol="0" anchor="ctr"/>
+          <a:lstStyle/>
+          <a:p>
+            <a:pPr algn="ctr"/>
+            <a:endParaRPr lang="en-US"/>
+          </a:p>
+        </p:txBody>
+      </p:sp>
+      <p:sp>
+        <p:nvSpPr>
+          <p:cNvPr id="33" name="Rectangle 32">
+            <a:extLst>
+              <a:ext uri="{FF2B5EF4-FFF2-40B4-BE49-F238E27FC236}">
+                <a16:creationId xmlns:a16="http://schemas.microsoft.com/office/drawing/2014/main" id="{6016219D-510E-4184-9090-6D5578A87BD1}"/>
+              </a:ext>
+              <a:ext uri="{C183D7F6-B498-43B3-948B-1728B52AA6E4}">
+                <adec:decorative xmlns:adec="http://schemas.microsoft.com/office/drawing/2017/decorative" val="1"/>
+              </a:ext>
+            </a:extLst>
+          </p:cNvPr>
+          <p:cNvSpPr>
+            <a:spLocks noGrp="1" noRot="1" noChangeAspect="1" noMove="1" noResize="1" noEditPoints="1" noAdjustHandles="1" noChangeArrowheads="1" noChangeShapeType="1" noTextEdit="1"/>
+          </p:cNvSpPr>
+          <p:nvPr>
+            <p:extLst>
+              <p:ext uri="{386F3935-93C4-4BCD-93E2-E3B085C9AB24}">
+                <p16:designElem xmlns:p16="http://schemas.microsoft.com/office/powerpoint/2015/main" val="1"/>
+              </p:ext>
+            </p:extLst>
+          </p:nvPr>
+        </p:nvSpPr>
+        <p:spPr>
+          <a:xfrm rot="5400000">
+            <a:off x="3908719" y="-3931841"/>
+            <a:ext cx="4374557" cy="12192000"/>
+          </a:xfrm>
+          <a:prstGeom prst="rect">
+            <a:avLst/>
+          </a:prstGeom>
+          <a:gradFill>
+            <a:gsLst>
+              <a:gs pos="40000">
+                <a:schemeClr val="accent1">
+                  <a:alpha val="0"/>
+                </a:schemeClr>
+              </a:gs>
+              <a:gs pos="100000">
+                <a:schemeClr val="accent1">
+                  <a:lumMod val="75000"/>
+                  <a:alpha val="52000"/>
+                </a:schemeClr>
+              </a:gs>
+            </a:gsLst>
+            <a:lin ang="2400000" scaled="0"/>
+          </a:gradFill>
+          <a:ln>
+            <a:noFill/>
+          </a:ln>
+        </p:spPr>
+        <p:style>
+          <a:lnRef idx="2">
+            <a:schemeClr val="accent1">
+              <a:shade val="50000"/>
+            </a:schemeClr>
+          </a:lnRef>
+          <a:fillRef idx="1">
+            <a:schemeClr val="accent1"/>
+          </a:fillRef>
+          <a:effectRef idx="0">
+            <a:schemeClr val="accent1"/>
+          </a:effectRef>
+          <a:fontRef idx="minor">
+            <a:schemeClr val="lt1"/>
+          </a:fontRef>
+        </p:style>
+        <p:txBody>
+          <a:bodyPr rtlCol="0" anchor="ctr"/>
+          <a:lstStyle/>
+          <a:p>
+            <a:pPr algn="ctr"/>
+            <a:endParaRPr lang="en-US"/>
+          </a:p>
+        </p:txBody>
+      </p:sp>
+      <p:sp>
+        <p:nvSpPr>
+          <p:cNvPr id="35" name="Rectangle 34">
+            <a:extLst>
+              <a:ext uri="{FF2B5EF4-FFF2-40B4-BE49-F238E27FC236}">
+                <a16:creationId xmlns:a16="http://schemas.microsoft.com/office/drawing/2014/main" id="{AFF4A713-7B75-4B21-90D7-5AB19547C728}"/>
+              </a:ext>
+              <a:ext uri="{C183D7F6-B498-43B3-948B-1728B52AA6E4}">
+                <adec:decorative xmlns:adec="http://schemas.microsoft.com/office/drawing/2017/decorative" val="1"/>
+              </a:ext>
+            </a:extLst>
+          </p:cNvPr>
+          <p:cNvSpPr>
+            <a:spLocks noGrp="1" noRot="1" noChangeAspect="1" noMove="1" noResize="1" noEditPoints="1" noAdjustHandles="1" noChangeArrowheads="1" noChangeShapeType="1" noTextEdit="1"/>
+          </p:cNvSpPr>
+          <p:nvPr>
+            <p:extLst>
+              <p:ext uri="{386F3935-93C4-4BCD-93E2-E3B085C9AB24}">
+                <p16:designElem xmlns:p16="http://schemas.microsoft.com/office/powerpoint/2015/main" val="1"/>
+              </p:ext>
+            </p:extLst>
+          </p:nvPr>
+        </p:nvSpPr>
+        <p:spPr>
+          <a:xfrm rot="5400000">
+            <a:off x="4136696" y="-3703868"/>
+            <a:ext cx="4374128" cy="11736479"/>
+          </a:xfrm>
+          <a:prstGeom prst="rect">
+            <a:avLst/>
+          </a:prstGeom>
+          <a:gradFill>
+            <a:gsLst>
+              <a:gs pos="17000">
+                <a:schemeClr val="accent1">
+                  <a:alpha val="0"/>
+                </a:schemeClr>
+              </a:gs>
+              <a:gs pos="100000">
+                <a:srgbClr val="000000">
+                  <a:alpha val="37000"/>
+                </a:srgbClr>
+              </a:gs>
+            </a:gsLst>
+            <a:lin ang="7800000" scaled="0"/>
+          </a:gradFill>
+          <a:ln>
+            <a:noFill/>
+          </a:ln>
+        </p:spPr>
+        <p:style>
+          <a:lnRef idx="2">
+            <a:schemeClr val="accent1">
+              <a:shade val="50000"/>
+            </a:schemeClr>
+          </a:lnRef>
+          <a:fillRef idx="1">
+            <a:schemeClr val="accent1"/>
+          </a:fillRef>
+          <a:effectRef idx="0">
+            <a:schemeClr val="accent1"/>
+          </a:effectRef>
+          <a:fontRef idx="minor">
+            <a:schemeClr val="lt1"/>
+          </a:fontRef>
+        </p:style>
+        <p:txBody>
+          <a:bodyPr rtlCol="0" anchor="ctr"/>
+          <a:lstStyle/>
+          <a:p>
+            <a:pPr algn="ctr"/>
+            <a:endParaRPr lang="en-US"/>
+          </a:p>
+        </p:txBody>
+      </p:sp>
+      <p:sp>
+        <p:nvSpPr>
+          <p:cNvPr id="37" name="Rectangle 36">
+            <a:extLst>
+              <a:ext uri="{FF2B5EF4-FFF2-40B4-BE49-F238E27FC236}">
+                <a16:creationId xmlns:a16="http://schemas.microsoft.com/office/drawing/2014/main" id="{DC631C0B-6DA6-4E57-8231-CE32B3434A7E}"/>
+              </a:ext>
+              <a:ext uri="{C183D7F6-B498-43B3-948B-1728B52AA6E4}">
+                <adec:decorative xmlns:adec="http://schemas.microsoft.com/office/drawing/2017/decorative" val="1"/>
+              </a:ext>
+            </a:extLst>
+          </p:cNvPr>
+          <p:cNvSpPr>
+            <a:spLocks noGrp="1" noRot="1" noChangeAspect="1" noMove="1" noResize="1" noEditPoints="1" noAdjustHandles="1" noChangeArrowheads="1" noChangeShapeType="1" noTextEdit="1"/>
+          </p:cNvSpPr>
+          <p:nvPr>
+            <p:extLst>
+              <p:ext uri="{386F3935-93C4-4BCD-93E2-E3B085C9AB24}">
+                <p16:designElem xmlns:p16="http://schemas.microsoft.com/office/powerpoint/2015/main" val="1"/>
+              </p:ext>
+            </p:extLst>
+          </p:nvPr>
+        </p:nvSpPr>
+        <p:spPr>
+          <a:xfrm>
+            <a:off x="-5" y="-22690"/>
+            <a:ext cx="8542485" cy="4374126"/>
+          </a:xfrm>
+          <a:prstGeom prst="rect">
+            <a:avLst/>
+          </a:prstGeom>
+          <a:gradFill>
+            <a:gsLst>
+              <a:gs pos="0">
+                <a:schemeClr val="accent1">
+                  <a:lumMod val="50000"/>
+                  <a:alpha val="0"/>
+                </a:schemeClr>
+              </a:gs>
+              <a:gs pos="100000">
+                <a:srgbClr val="000000">
+                  <a:alpha val="25000"/>
+                </a:srgbClr>
+              </a:gs>
+            </a:gsLst>
+            <a:lin ang="18600000" scaled="0"/>
+          </a:gradFill>
+          <a:ln>
+            <a:noFill/>
+          </a:ln>
+        </p:spPr>
+        <p:style>
+          <a:lnRef idx="2">
+            <a:schemeClr val="accent1">
+              <a:shade val="50000"/>
+            </a:schemeClr>
+          </a:lnRef>
+          <a:fillRef idx="1">
+            <a:schemeClr val="accent1"/>
+          </a:fillRef>
+          <a:effectRef idx="0">
+            <a:schemeClr val="accent1"/>
+          </a:effectRef>
+          <a:fontRef idx="minor">
+            <a:schemeClr val="lt1"/>
+          </a:fontRef>
+        </p:style>
+        <p:txBody>
+          <a:bodyPr rtlCol="0" anchor="ctr"/>
+          <a:lstStyle/>
+          <a:p>
+            <a:pPr algn="ctr"/>
+            <a:endParaRPr lang="en-US"/>
+          </a:p>
+        </p:txBody>
+      </p:sp>
+      <p:sp>
+        <p:nvSpPr>
+          <p:cNvPr id="39" name="Freeform: Shape 38">
+            <a:extLst>
+              <a:ext uri="{FF2B5EF4-FFF2-40B4-BE49-F238E27FC236}">
+                <a16:creationId xmlns:a16="http://schemas.microsoft.com/office/drawing/2014/main" id="{C29501E6-A978-4A61-9689-9085AF97A53A}"/>
+              </a:ext>
+              <a:ext uri="{C183D7F6-B498-43B3-948B-1728B52AA6E4}">
+                <adec:decorative xmlns:adec="http://schemas.microsoft.com/office/drawing/2017/decorative" val="1"/>
+              </a:ext>
+            </a:extLst>
+          </p:cNvPr>
+          <p:cNvSpPr>
+            <a:spLocks noGrp="1" noRot="1" noChangeAspect="1" noMove="1" noResize="1" noEditPoints="1" noAdjustHandles="1" noChangeArrowheads="1" noChangeShapeType="1" noTextEdit="1"/>
+          </p:cNvSpPr>
+          <p:nvPr>
+            <p:extLst>
+              <p:ext uri="{386F3935-93C4-4BCD-93E2-E3B085C9AB24}">
+                <p16:designElem xmlns:p16="http://schemas.microsoft.com/office/powerpoint/2015/main" val="1"/>
+              </p:ext>
+            </p:extLst>
+          </p:nvPr>
+        </p:nvSpPr>
+        <p:spPr>
+          <a:xfrm rot="12508972">
+            <a:off x="5945431" y="-1032053"/>
+            <a:ext cx="4990147" cy="4439131"/>
+          </a:xfrm>
+          <a:custGeom>
+            <a:avLst/>
+            <a:gdLst>
+              <a:gd name="connsiteX0" fmla="*/ 4990147 w 4990147"/>
+              <a:gd name="connsiteY0" fmla="*/ 2229378 h 4439131"/>
+              <a:gd name="connsiteX1" fmla="*/ 917384 w 4990147"/>
+              <a:gd name="connsiteY1" fmla="*/ 4439131 h 4439131"/>
+              <a:gd name="connsiteX2" fmla="*/ 910814 w 4990147"/>
+              <a:gd name="connsiteY2" fmla="*/ 4434219 h 4439131"/>
+              <a:gd name="connsiteX3" fmla="*/ 0 w 4990147"/>
+              <a:gd name="connsiteY3" fmla="*/ 2502877 h 4439131"/>
+              <a:gd name="connsiteX4" fmla="*/ 2502877 w 4990147"/>
+              <a:gd name="connsiteY4" fmla="*/ 0 h 4439131"/>
+              <a:gd name="connsiteX5" fmla="*/ 4954904 w 4990147"/>
+              <a:gd name="connsiteY5" fmla="*/ 1998460 h 4439131"/>
+            </a:gdLst>
+            <a:ahLst/>
+            <a:cxnLst>
+              <a:cxn ang="0">
+                <a:pos x="connsiteX0" y="connsiteY0"/>
+              </a:cxn>
+              <a:cxn ang="0">
+                <a:pos x="connsiteX1" y="connsiteY1"/>
+              </a:cxn>
+              <a:cxn ang="0">
+                <a:pos x="connsiteX2" y="connsiteY2"/>
+              </a:cxn>
+              <a:cxn ang="0">
+                <a:pos x="connsiteX3" y="connsiteY3"/>
+              </a:cxn>
+              <a:cxn ang="0">
+                <a:pos x="connsiteX4" y="connsiteY4"/>
+              </a:cxn>
+              <a:cxn ang="0">
+                <a:pos x="connsiteX5" y="connsiteY5"/>
+              </a:cxn>
+            </a:cxnLst>
+            <a:rect l="l" t="t" r="r" b="b"/>
+            <a:pathLst>
+              <a:path w="4990147" h="4439131">
+                <a:moveTo>
+                  <a:pt x="4990147" y="2229378"/>
+                </a:moveTo>
+                <a:lnTo>
+                  <a:pt x="917384" y="4439131"/>
+                </a:lnTo>
+                <a:lnTo>
+                  <a:pt x="910814" y="4434219"/>
+                </a:lnTo>
+                <a:cubicBezTo>
+                  <a:pt x="354557" y="3975154"/>
+                  <a:pt x="0" y="3280421"/>
+                  <a:pt x="0" y="2502877"/>
+                </a:cubicBezTo>
+                <a:cubicBezTo>
+                  <a:pt x="0" y="1120576"/>
+                  <a:pt x="1120576" y="0"/>
+                  <a:pt x="2502877" y="0"/>
+                </a:cubicBezTo>
+                <a:cubicBezTo>
+                  <a:pt x="3712390" y="0"/>
+                  <a:pt x="4721520" y="857941"/>
+                  <a:pt x="4954904" y="1998460"/>
+                </a:cubicBezTo>
+                <a:close/>
+              </a:path>
+            </a:pathLst>
+          </a:custGeom>
+          <a:gradFill>
+            <a:gsLst>
+              <a:gs pos="0">
+                <a:schemeClr val="accent1">
+                  <a:alpha val="22000"/>
+                </a:schemeClr>
+              </a:gs>
+              <a:gs pos="87000">
+                <a:schemeClr val="accent1">
+                  <a:lumMod val="60000"/>
+                  <a:lumOff val="40000"/>
+                  <a:alpha val="2000"/>
+                </a:schemeClr>
+              </a:gs>
+            </a:gsLst>
+            <a:lin ang="8400000" scaled="0"/>
+          </a:gradFill>
+          <a:ln>
+            <a:noFill/>
+          </a:ln>
+        </p:spPr>
+        <p:style>
+          <a:lnRef idx="2">
+            <a:schemeClr val="accent1">
+              <a:shade val="50000"/>
+            </a:schemeClr>
+          </a:lnRef>
+          <a:fillRef idx="1">
+            <a:schemeClr val="accent1"/>
+          </a:fillRef>
+          <a:effectRef idx="0">
+            <a:schemeClr val="accent1"/>
+          </a:effectRef>
+          <a:fontRef idx="minor">
+            <a:schemeClr val="lt1"/>
+          </a:fontRef>
+        </p:style>
+        <p:txBody>
+          <a:bodyPr wrap="square" rtlCol="0" anchor="ctr">
+            <a:noAutofit/>
+          </a:bodyPr>
+          <a:lstStyle/>
+          <a:p>
+            <a:pPr algn="ctr"/>
+            <a:endParaRPr lang="en-US" dirty="0"/>
+          </a:p>
+        </p:txBody>
+      </p:sp>
       <p:sp>
         <p:nvSpPr>
           <p:cNvPr id="2" name="Title 1">
@@ -10006,24 +10535,31 @@
         </p:nvSpPr>
         <p:spPr>
           <a:xfrm>
-            <a:off x="1523999" y="1122362"/>
-            <a:ext cx="9183329" cy="3066179"/>
+            <a:off x="1314824" y="735106"/>
+            <a:ext cx="10053763" cy="2928470"/>
           </a:xfrm>
         </p:spPr>
         <p:txBody>
-          <a:bodyPr>
-            <a:normAutofit fontScale="90000"/>
+          <a:bodyPr anchor="b">
+            <a:normAutofit/>
           </a:bodyPr>
           <a:lstStyle/>
           <a:p>
+            <a:pPr algn="l"/>
             <a:r>
-              <a:rPr lang="en-US" sz="6600" b="1" dirty="0">
+              <a:rPr lang="en-US" sz="4800" b="1">
+                <a:solidFill>
+                  <a:srgbClr val="FFFFFF"/>
+                </a:solidFill>
                 <a:latin typeface="Segoe UI Semibold" panose="020B0702040204020203" pitchFamily="34" charset="0"/>
                 <a:cs typeface="Segoe UI Semibold" panose="020B0702040204020203" pitchFamily="34" charset="0"/>
               </a:rPr>
               <a:t>Virtual Server Monitoring and Performance Optimization</a:t>
             </a:r>
-            <a:endParaRPr lang="en-IN" sz="6600" b="1" dirty="0">
+            <a:endParaRPr lang="en-IN" sz="4800" b="1">
+              <a:solidFill>
+                <a:srgbClr val="FFFFFF"/>
+              </a:solidFill>
               <a:latin typeface="Segoe UI Semibold" panose="020B0702040204020203" pitchFamily="34" charset="0"/>
               <a:cs typeface="Segoe UI Semibold" panose="020B0702040204020203" pitchFamily="34" charset="0"/>
             </a:endParaRPr>
@@ -10048,17 +10584,12 @@
         </p:nvSpPr>
         <p:spPr bwMode="auto">
           <a:xfrm>
-            <a:off x="8420519" y="5153463"/>
-            <a:ext cx="3390445" cy="923330"/>
+            <a:off x="8709977" y="4875589"/>
+            <a:ext cx="2658610" cy="1458258"/>
           </a:xfrm>
           <a:prstGeom prst="rect">
             <a:avLst/>
           </a:prstGeom>
-          <a:noFill/>
-          <a:ln>
-            <a:noFill/>
-          </a:ln>
-          <a:effectLst/>
           <a:extLst>
             <a:ext uri="{909E8E84-426E-40DD-AFC4-6F175D3DCCD1}">
               <a14:hiddenFill xmlns:a14="http://schemas.microsoft.com/office/drawing/2010/main">
@@ -10089,36 +10620,30 @@
           </a:extLst>
         </p:spPr>
         <p:txBody>
-          <a:bodyPr vert="horz" wrap="square" lIns="91440" tIns="45720" rIns="91440" bIns="45720" numCol="1" anchor="ctr" anchorCtr="0" compatLnSpc="1">
+          <a:bodyPr vert="horz" lIns="91440" tIns="45720" rIns="91440" bIns="45720" numCol="1" anchor="ctr" anchorCtr="0" compatLnSpc="1">
             <a:prstTxWarp prst="textNoShape">
               <a:avLst/>
             </a:prstTxWarp>
-            <a:spAutoFit/>
+            <a:normAutofit/>
           </a:bodyPr>
           <a:lstStyle/>
           <a:p>
             <a:pPr marL="0" marR="0" lvl="0" indent="0" algn="l" defTabSz="914400" rtl="0" eaLnBrk="0" fontAlgn="base" latinLnBrk="0" hangingPunct="0">
-              <a:lnSpc>
-                <a:spcPct val="100000"/>
-              </a:lnSpc>
               <a:spcBef>
                 <a:spcPct val="0"/>
               </a:spcBef>
               <a:spcAft>
-                <a:spcPct val="0"/>
+                <a:spcPts val="600"/>
               </a:spcAft>
               <a:buClrTx/>
               <a:buSzTx/>
               <a:tabLst/>
             </a:pPr>
             <a:r>
-              <a:rPr kumimoji="0" lang="en-US" altLang="en-US" sz="1800" b="0" i="0" u="none" strike="noStrike" cap="none" normalizeH="0" baseline="0" dirty="0">
+              <a:rPr kumimoji="0" lang="en-US" altLang="en-US" b="0" i="0" u="none" strike="noStrike" cap="none" normalizeH="0" baseline="0" dirty="0">
                 <a:ln>
                   <a:noFill/>
                 </a:ln>
-                <a:solidFill>
-                  <a:schemeClr val="tx1"/>
-                </a:solidFill>
                 <a:effectLst/>
                 <a:latin typeface="Arial" panose="020B0604020202020204" pitchFamily="34" charset="0"/>
               </a:rPr>
@@ -10127,27 +10652,21 @@
           </a:p>
           <a:p>
             <a:pPr marL="0" marR="0" lvl="0" indent="0" algn="l" defTabSz="914400" rtl="0" eaLnBrk="0" fontAlgn="base" latinLnBrk="0" hangingPunct="0">
-              <a:lnSpc>
-                <a:spcPct val="100000"/>
-              </a:lnSpc>
               <a:spcBef>
                 <a:spcPct val="0"/>
               </a:spcBef>
               <a:spcAft>
-                <a:spcPct val="0"/>
+                <a:spcPts val="600"/>
               </a:spcAft>
               <a:buClrTx/>
               <a:buSzTx/>
               <a:tabLst/>
             </a:pPr>
             <a:r>
-              <a:rPr kumimoji="0" lang="en-US" altLang="en-US" sz="1800" b="0" i="0" u="none" strike="noStrike" cap="none" normalizeH="0" baseline="0" dirty="0">
+              <a:rPr kumimoji="0" lang="en-US" altLang="en-US" b="0" i="0" u="none" strike="noStrike" cap="none" normalizeH="0" baseline="0" dirty="0">
                 <a:ln>
                   <a:noFill/>
                 </a:ln>
-                <a:solidFill>
-                  <a:schemeClr val="tx1"/>
-                </a:solidFill>
                 <a:effectLst/>
                 <a:latin typeface="Arial" panose="020B0604020202020204" pitchFamily="34" charset="0"/>
               </a:rPr>
@@ -10156,32 +10675,26 @@
           </a:p>
           <a:p>
             <a:pPr marL="0" marR="0" lvl="0" indent="0" algn="l" defTabSz="914400" rtl="0" eaLnBrk="0" fontAlgn="base" latinLnBrk="0" hangingPunct="0">
-              <a:lnSpc>
-                <a:spcPct val="100000"/>
-              </a:lnSpc>
               <a:spcBef>
                 <a:spcPct val="0"/>
               </a:spcBef>
               <a:spcAft>
-                <a:spcPct val="0"/>
+                <a:spcPts val="600"/>
               </a:spcAft>
               <a:buClrTx/>
               <a:buSzTx/>
               <a:tabLst/>
             </a:pPr>
             <a:r>
-              <a:rPr lang="en-US" altLang="en-US" sz="1800" dirty="0">
+              <a:rPr lang="en-US" altLang="en-US" dirty="0">
                 <a:latin typeface="Arial" panose="020B0604020202020204" pitchFamily="34" charset="0"/>
               </a:rPr>
               <a:t>13/03/2026</a:t>
             </a:r>
-            <a:endParaRPr kumimoji="0" lang="en-US" altLang="en-US" sz="1800" b="0" i="0" u="none" strike="noStrike" cap="none" normalizeH="0" baseline="0" dirty="0">
+            <a:endParaRPr kumimoji="0" lang="en-US" altLang="en-US" b="0" i="0" u="none" strike="noStrike" cap="none" normalizeH="0" baseline="0" dirty="0">
               <a:ln>
                 <a:noFill/>
               </a:ln>
-              <a:solidFill>
-                <a:schemeClr val="tx1"/>
-              </a:solidFill>
               <a:effectLst/>
               <a:latin typeface="Arial" panose="020B0604020202020204" pitchFamily="34" charset="0"/>
             </a:endParaRPr>
@@ -10198,6 +10711,273 @@
   <p:clrMapOvr>
     <a:masterClrMapping/>
   </p:clrMapOvr>
+  <p:timing>
+    <p:tnLst>
+      <p:par>
+        <p:cTn id="1" dur="indefinite" restart="never" nodeType="tmRoot">
+          <p:childTnLst>
+            <p:seq concurrent="1" nextAc="seek">
+              <p:cTn id="2" dur="indefinite" nodeType="mainSeq">
+                <p:childTnLst>
+                  <p:par>
+                    <p:cTn id="3" fill="hold">
+                      <p:stCondLst>
+                        <p:cond delay="indefinite"/>
+                        <p:cond evt="onBegin" delay="0">
+                          <p:tn val="2"/>
+                        </p:cond>
+                      </p:stCondLst>
+                      <p:childTnLst>
+                        <p:par>
+                          <p:cTn id="4" fill="hold">
+                            <p:stCondLst>
+                              <p:cond delay="0"/>
+                            </p:stCondLst>
+                            <p:childTnLst>
+                              <p:par>
+                                <p:cTn id="5" presetID="10" presetClass="entr" presetSubtype="0" fill="hold" grpId="0" nodeType="withEffect">
+                                  <p:stCondLst>
+                                    <p:cond delay="500"/>
+                                  </p:stCondLst>
+                                  <p:iterate type="lt">
+                                    <p:tmPct val="10000"/>
+                                  </p:iterate>
+                                  <p:childTnLst>
+                                    <p:set>
+                                      <p:cBhvr>
+                                        <p:cTn id="6" dur="1" fill="hold">
+                                          <p:stCondLst>
+                                            <p:cond delay="0"/>
+                                          </p:stCondLst>
+                                        </p:cTn>
+                                        <p:tgtEl>
+                                          <p:spTgt spid="2"/>
+                                        </p:tgtEl>
+                                        <p:attrNameLst>
+                                          <p:attrName>style.visibility</p:attrName>
+                                        </p:attrNameLst>
+                                      </p:cBhvr>
+                                      <p:to>
+                                        <p:strVal val="visible"/>
+                                      </p:to>
+                                    </p:set>
+                                    <p:animEffect transition="in" filter="fade">
+                                      <p:cBhvr>
+                                        <p:cTn id="7" dur="400"/>
+                                        <p:tgtEl>
+                                          <p:spTgt spid="2"/>
+                                        </p:tgtEl>
+                                      </p:cBhvr>
+                                    </p:animEffect>
+                                  </p:childTnLst>
+                                </p:cTn>
+                              </p:par>
+                              <p:par>
+                                <p:cTn id="8" presetID="10" presetClass="entr" presetSubtype="0" fill="hold" grpId="0" nodeType="withEffect">
+                                  <p:stCondLst>
+                                    <p:cond delay="2000"/>
+                                  </p:stCondLst>
+                                  <p:iterate type="lt">
+                                    <p:tmPct val="10000"/>
+                                  </p:iterate>
+                                  <p:childTnLst>
+                                    <p:set>
+                                      <p:cBhvr>
+                                        <p:cTn id="9" dur="1" fill="hold">
+                                          <p:stCondLst>
+                                            <p:cond delay="0"/>
+                                          </p:stCondLst>
+                                        </p:cTn>
+                                        <p:tgtEl>
+                                          <p:spTgt spid="4">
+                                            <p:txEl>
+                                              <p:pRg st="0" end="0"/>
+                                            </p:txEl>
+                                          </p:spTgt>
+                                        </p:tgtEl>
+                                        <p:attrNameLst>
+                                          <p:attrName>style.visibility</p:attrName>
+                                        </p:attrNameLst>
+                                      </p:cBhvr>
+                                      <p:to>
+                                        <p:strVal val="visible"/>
+                                      </p:to>
+                                    </p:set>
+                                    <p:animEffect transition="in" filter="fade">
+                                      <p:cBhvr>
+                                        <p:cTn id="10" dur="400"/>
+                                        <p:tgtEl>
+                                          <p:spTgt spid="4">
+                                            <p:txEl>
+                                              <p:pRg st="0" end="0"/>
+                                            </p:txEl>
+                                          </p:spTgt>
+                                        </p:tgtEl>
+                                      </p:cBhvr>
+                                    </p:animEffect>
+                                  </p:childTnLst>
+                                </p:cTn>
+                              </p:par>
+                            </p:childTnLst>
+                          </p:cTn>
+                        </p:par>
+                      </p:childTnLst>
+                    </p:cTn>
+                  </p:par>
+                  <p:par>
+                    <p:cTn id="11" fill="hold">
+                      <p:stCondLst>
+                        <p:cond delay="indefinite"/>
+                      </p:stCondLst>
+                      <p:childTnLst>
+                        <p:par>
+                          <p:cTn id="12" fill="hold">
+                            <p:stCondLst>
+                              <p:cond delay="0"/>
+                            </p:stCondLst>
+                            <p:childTnLst>
+                              <p:par>
+                                <p:cTn id="13" presetID="10" presetClass="entr" presetSubtype="0" fill="hold" grpId="0" nodeType="clickEffect">
+                                  <p:stCondLst>
+                                    <p:cond delay="2000"/>
+                                  </p:stCondLst>
+                                  <p:iterate type="lt">
+                                    <p:tmPct val="10000"/>
+                                  </p:iterate>
+                                  <p:childTnLst>
+                                    <p:set>
+                                      <p:cBhvr>
+                                        <p:cTn id="14" dur="1" fill="hold">
+                                          <p:stCondLst>
+                                            <p:cond delay="0"/>
+                                          </p:stCondLst>
+                                        </p:cTn>
+                                        <p:tgtEl>
+                                          <p:spTgt spid="4">
+                                            <p:txEl>
+                                              <p:pRg st="1" end="1"/>
+                                            </p:txEl>
+                                          </p:spTgt>
+                                        </p:tgtEl>
+                                        <p:attrNameLst>
+                                          <p:attrName>style.visibility</p:attrName>
+                                        </p:attrNameLst>
+                                      </p:cBhvr>
+                                      <p:to>
+                                        <p:strVal val="visible"/>
+                                      </p:to>
+                                    </p:set>
+                                    <p:animEffect transition="in" filter="fade">
+                                      <p:cBhvr>
+                                        <p:cTn id="15" dur="400"/>
+                                        <p:tgtEl>
+                                          <p:spTgt spid="4">
+                                            <p:txEl>
+                                              <p:pRg st="1" end="1"/>
+                                            </p:txEl>
+                                          </p:spTgt>
+                                        </p:tgtEl>
+                                      </p:cBhvr>
+                                    </p:animEffect>
+                                  </p:childTnLst>
+                                </p:cTn>
+                              </p:par>
+                            </p:childTnLst>
+                          </p:cTn>
+                        </p:par>
+                      </p:childTnLst>
+                    </p:cTn>
+                  </p:par>
+                  <p:par>
+                    <p:cTn id="16" fill="hold">
+                      <p:stCondLst>
+                        <p:cond delay="indefinite"/>
+                      </p:stCondLst>
+                      <p:childTnLst>
+                        <p:par>
+                          <p:cTn id="17" fill="hold">
+                            <p:stCondLst>
+                              <p:cond delay="0"/>
+                            </p:stCondLst>
+                            <p:childTnLst>
+                              <p:par>
+                                <p:cTn id="18" presetID="10" presetClass="entr" presetSubtype="0" fill="hold" grpId="0" nodeType="clickEffect">
+                                  <p:stCondLst>
+                                    <p:cond delay="2000"/>
+                                  </p:stCondLst>
+                                  <p:iterate type="lt">
+                                    <p:tmPct val="10000"/>
+                                  </p:iterate>
+                                  <p:childTnLst>
+                                    <p:set>
+                                      <p:cBhvr>
+                                        <p:cTn id="19" dur="1" fill="hold">
+                                          <p:stCondLst>
+                                            <p:cond delay="0"/>
+                                          </p:stCondLst>
+                                        </p:cTn>
+                                        <p:tgtEl>
+                                          <p:spTgt spid="4">
+                                            <p:txEl>
+                                              <p:pRg st="2" end="2"/>
+                                            </p:txEl>
+                                          </p:spTgt>
+                                        </p:tgtEl>
+                                        <p:attrNameLst>
+                                          <p:attrName>style.visibility</p:attrName>
+                                        </p:attrNameLst>
+                                      </p:cBhvr>
+                                      <p:to>
+                                        <p:strVal val="visible"/>
+                                      </p:to>
+                                    </p:set>
+                                    <p:animEffect transition="in" filter="fade">
+                                      <p:cBhvr>
+                                        <p:cTn id="20" dur="400"/>
+                                        <p:tgtEl>
+                                          <p:spTgt spid="4">
+                                            <p:txEl>
+                                              <p:pRg st="2" end="2"/>
+                                            </p:txEl>
+                                          </p:spTgt>
+                                        </p:tgtEl>
+                                      </p:cBhvr>
+                                    </p:animEffect>
+                                  </p:childTnLst>
+                                </p:cTn>
+                              </p:par>
+                            </p:childTnLst>
+                          </p:cTn>
+                        </p:par>
+                      </p:childTnLst>
+                    </p:cTn>
+                  </p:par>
+                </p:childTnLst>
+              </p:cTn>
+              <p:prevCondLst>
+                <p:cond evt="onPrev" delay="0">
+                  <p:tgtEl>
+                    <p:sldTgt/>
+                  </p:tgtEl>
+                </p:cond>
+              </p:prevCondLst>
+              <p:nextCondLst>
+                <p:cond evt="onNext" delay="0">
+                  <p:tgtEl>
+                    <p:sldTgt/>
+                  </p:tgtEl>
+                </p:cond>
+              </p:nextCondLst>
+            </p:seq>
+          </p:childTnLst>
+        </p:cTn>
+      </p:par>
+    </p:tnLst>
+    <p:bldLst>
+      <p:bldP spid="2" grpId="0"/>
+      <p:bldP spid="4" grpId="0" build="p"/>
+    </p:bldLst>
+  </p:timing>
 </p:sld>
 </file>
 
@@ -11494,6 +12274,72 @@
 <file path=ppt/slides/slide5.xml><?xml version="1.0" encoding="utf-8"?>
 <p:sld xmlns:a="http://schemas.openxmlformats.org/drawingml/2006/main" xmlns:r="http://schemas.openxmlformats.org/officeDocument/2006/relationships" xmlns:p="http://schemas.openxmlformats.org/presentationml/2006/main">
   <p:cSld>
+    <p:spTree>
+      <p:nvGrpSpPr>
+        <p:cNvPr id="1" name=""/>
+        <p:cNvGrpSpPr/>
+        <p:nvPr/>
+      </p:nvGrpSpPr>
+      <p:grpSpPr>
+        <a:xfrm>
+          <a:off x="0" y="0"/>
+          <a:ext cx="0" cy="0"/>
+          <a:chOff x="0" y="0"/>
+          <a:chExt cx="0" cy="0"/>
+        </a:xfrm>
+      </p:grpSpPr>
+      <p:pic>
+        <p:nvPicPr>
+          <p:cNvPr id="5" name="Picture 4">
+            <a:extLst>
+              <a:ext uri="{FF2B5EF4-FFF2-40B4-BE49-F238E27FC236}">
+                <a16:creationId xmlns:a16="http://schemas.microsoft.com/office/drawing/2014/main" id="{EB04DC88-58B2-8B7A-0B61-C77188F72521}"/>
+              </a:ext>
+            </a:extLst>
+          </p:cNvPr>
+          <p:cNvPicPr>
+            <a:picLocks noChangeAspect="1"/>
+          </p:cNvPicPr>
+          <p:nvPr/>
+        </p:nvPicPr>
+        <p:blipFill>
+          <a:blip r:embed="rId2">
+            <a:extLst>
+              <a:ext uri="{28A0092B-C50C-407E-A947-70E740481C1C}">
+                <a14:useLocalDpi xmlns:a14="http://schemas.microsoft.com/office/drawing/2010/main" val="0"/>
+              </a:ext>
+            </a:extLst>
+          </a:blip>
+          <a:stretch>
+            <a:fillRect/>
+          </a:stretch>
+        </p:blipFill>
+        <p:spPr>
+          <a:xfrm>
+            <a:off x="0" y="16565"/>
+            <a:ext cx="12192000" cy="6824870"/>
+          </a:xfrm>
+          <a:prstGeom prst="rect">
+            <a:avLst/>
+          </a:prstGeom>
+        </p:spPr>
+      </p:pic>
+    </p:spTree>
+    <p:extLst>
+      <p:ext uri="{BB962C8B-B14F-4D97-AF65-F5344CB8AC3E}">
+        <p14:creationId xmlns:p14="http://schemas.microsoft.com/office/powerpoint/2010/main" val="2231952283"/>
+      </p:ext>
+    </p:extLst>
+  </p:cSld>
+  <p:clrMapOvr>
+    <a:masterClrMapping/>
+  </p:clrMapOvr>
+</p:sld>
+</file>
+
+<file path=ppt/slides/slide6.xml><?xml version="1.0" encoding="utf-8"?>
+<p:sld xmlns:a="http://schemas.openxmlformats.org/drawingml/2006/main" xmlns:r="http://schemas.openxmlformats.org/officeDocument/2006/relationships" xmlns:p="http://schemas.openxmlformats.org/presentationml/2006/main">
+  <p:cSld>
     <p:bg>
       <p:bgPr>
         <a:solidFill>
@@ -11912,7 +12758,7 @@
 </p:sld>
 </file>
 
-<file path=ppt/slides/slide6.xml><?xml version="1.0" encoding="utf-8"?>
+<file path=ppt/slides/slide7.xml><?xml version="1.0" encoding="utf-8"?>
 <p:sld xmlns:a="http://schemas.openxmlformats.org/drawingml/2006/main" xmlns:r="http://schemas.openxmlformats.org/officeDocument/2006/relationships" xmlns:p="http://schemas.openxmlformats.org/presentationml/2006/main">
   <p:cSld>
     <p:bg>
@@ -12328,7 +13174,7 @@
 </p:sld>
 </file>
 
-<file path=ppt/slides/slide7.xml><?xml version="1.0" encoding="utf-8"?>
+<file path=ppt/slides/slide8.xml><?xml version="1.0" encoding="utf-8"?>
 <p:sld xmlns:a="http://schemas.openxmlformats.org/drawingml/2006/main" xmlns:r="http://schemas.openxmlformats.org/officeDocument/2006/relationships" xmlns:p="http://schemas.openxmlformats.org/presentationml/2006/main">
   <p:cSld>
     <p:bg>
@@ -12643,7 +13489,7 @@
 </p:sld>
 </file>
 
-<file path=ppt/slides/slide8.xml><?xml version="1.0" encoding="utf-8"?>
+<file path=ppt/slides/slide9.xml><?xml version="1.0" encoding="utf-8"?>
 <p:sld xmlns:a="http://schemas.openxmlformats.org/drawingml/2006/main" xmlns:r="http://schemas.openxmlformats.org/officeDocument/2006/relationships" xmlns:p="http://schemas.openxmlformats.org/presentationml/2006/main">
   <p:cSld>
     <p:bg>
